--- a/reports/2026-10-18/YouTube_AI趨勢研究雷達_2026-10-18_簡報.pptx
+++ b/reports/2026-10-18/YouTube_AI趨勢研究雷達_2026-10-18_簡報.pptx
@@ -3197,7 +3197,7 @@
           </a:p>
           <a:p>
             <a:r>
-              <a:t>固定查詢：AI賺錢, AI副業</a:t>
+              <a:t>固定查詢：AI副業, AI賺錢</a:t>
             </a:r>
           </a:p>
         </p:txBody>
@@ -3257,37 +3257,37 @@
           <a:lstStyle/>
           <a:p>
             <a:r>
-              <a:t>1. 為什麼我勸你別再學 AI 賺錢？真正值錢的是這個｜68,215</a:t>
-            </a:r>
-          </a:p>
-          <a:p>
-            <a:r>
-              <a:t>2. The New Way To Make Money With AI T-Shirts｜30,878</a:t>
-            </a:r>
-          </a:p>
-          <a:p>
-            <a:r>
-              <a:t>3. 【神機能】Opus5.5がヤバすぎたので徹底解説しました【Claude Code】｜23,910</a:t>
-            </a:r>
-          </a:p>
-          <a:p>
-            <a:r>
-              <a:t>4. THE #1 A.I.  PASSIVE INCOME SIDE HUSTLE FOR 2027｜14,187</a:t>
-            </a:r>
-          </a:p>
-          <a:p>
-            <a:r>
-              <a:t>5. 【2026年最新】中学生からYouTube！？ChatGPTで月●●万円稼ぐ方法！顔出し・声出し無し！超初心者｜8,119</a:t>
-            </a:r>
-          </a:p>
-          <a:p>
-            <a:r>
-              <a:t>6. i need the last girls JOB!! #miami #higgsfieldpartner #｜7,679</a:t>
-            </a:r>
-          </a:p>
-          <a:p>
-            <a:r>
-              <a:t>7. 【ガチ検証】AIの助言だけで2週間起業した男の末路がヤバ過ぎた。｜7,417</a:t>
+              <a:t>1. THE FIRST PROMPT｜29,204</a:t>
+            </a:r>
+          </a:p>
+          <a:p>
+            <a:r>
+              <a:t>2. 【神機能】Opus5.5がヤバすぎたので徹底解説しました【Claude Code】｜27,784</a:t>
+            </a:r>
+          </a:p>
+          <a:p>
+            <a:r>
+              <a:t>3. 【最新副業】Canva×AIデジタルペーパー副業‼️月10万円を稼ぐ全手順・ロードマップ｜17,291</a:t>
+            </a:r>
+          </a:p>
+          <a:p>
+            <a:r>
+              <a:t>4. 【視聴者が実際に稼いだ‼️】AI動画で2ヶ月で登録者10万人！顔出し・声出しなしでAI×YouTubeで月●●｜16,920</a:t>
+            </a:r>
+          </a:p>
+          <a:p>
+            <a:r>
+              <a:t>5. 【AI時代の稼ぎ方】1人起業したい会社員が、今始めるべき副業！｜13,195</a:t>
+            </a:r>
+          </a:p>
+          <a:p>
+            <a:r>
+              <a:t>6. 【詰みます】AI×noteで稼げるのは今だけ？収益化の弊害が出る構造的理由｜10,026</a:t>
+            </a:r>
+          </a:p>
+          <a:p>
+            <a:r>
+              <a:t>7. 1000+天实践后总结的最强【AI赚钱】实际用法，零基础，零门槛，绝对比你想象中简单｜7,520</a:t>
             </a:r>
           </a:p>
         </p:txBody>
@@ -3609,7 +3609,7 @@
         <p:spPr>
           <a:xfrm>
             <a:off x="548640" y="1005840"/>
-            <a:ext cx="8046720" cy="7447697"/>
+            <a:ext cx="8046720" cy="7331662"/>
           </a:xfrm>
           <a:prstGeom prst="rect">
             <a:avLst/>
